--- a/DBTUNING/ch32_SGA튜닝2_공유풀_라지풀/ch32_SGA튜닝_공유풀과라지풀.pptx
+++ b/DBTUNING/ch32_SGA튜닝2_공유풀_라지풀/ch32_SGA튜닝_공유풀과라지풀.pptx
@@ -606,7 +606,7 @@
           <a:lstStyle/>
           <a:p>
             <a:r>
-              <a:t>커서 공유를 이해하려면 바인드 변수 자체와 CURSOR_SHARING을 구분해야 합니다. 바인드 변수는 애플리케이션이 SQL을 작성할 때 값을 자리표시자로 넘기는 것으로, 처음부터 커서가 하나만 생깁니다. 이것이 정공법입니다. CURSOR_SHARING=FORCE는 애플리케이션이 리터럴을 그대로 박아 넣었을 때 오라클이 실행 시점에 그것을 바인드로 바꿔치기하는 것으로 사후 보정에 가깝습니다. 그래서 FORCE는 앱을 못 고칠 때의 차선책이고 성능과 계획 품질 면에서 앱 수정만 못합니다. 2장에서 다룬 바인드 변수를 이 장은 공유 풀 점유라는 결과 쪽에서 다시 봅니다.</a:t>
+              <a:t>커서 공유를 이해하려면 바인드 변수 자체와 CURSOR_SHARING을 구분해야 합니다. 바인드 변수는 애플리케이션이 SQL을 작성할 때 값을 자리표시자로 넘기는 것으로, 처음부터 커서가 하나만 생깁니다. 이것이 정공법입니다. CURSOR_SHARING=FORCE는 애플리케이션이 리터럴을 그대로 박아 넣었을 때 오라클이 실행 시점에 그것을 바인드로 바꿔치기하는 것으로 사후 보정에 가깝습니다. 그래서 FORCE는 앱을 못 고칠 때의 차선책이고 성능과 계획 품질 면에서 앱 수정만 못합니다. ch16에서 다룬 바인드 변수를 이 장은 공유 풀 점유라는 결과 쪽에서 다시 봅니다.</a:t>
             </a:r>
           </a:p>
         </p:txBody>
@@ -886,7 +886,7 @@
           <a:lstStyle/>
           <a:p>
             <a:r>
-              <a:t>어드바이저는 17장의 V$DB_CACHE_ADVICE와 읽는 방식이 같습니다. 크기를 바꾸면 효과가 얼마나 변하는가의 곡선을 주고, 요령은 기울기가 꺾여 평평해지는 무릎을 찾는 것입니다. 무릎 이전은 확대가 유효하고 이후는 낭비입니다. 우리 실측은 416MB가 이미 무릎을 지난 지점이라 확대 곡선이 처음부터 평평합니다. 이 어드바이저가 이 장에서 특별한 이유는, ORA-04031을 만나 크기를 키우고 싶을 때 확대 곡선이 평평하면 그것이 크기를 키워도 소용없다는 정량적 증거이기 때문입니다. 곡선이 가파르면 확대, 평평하면 파싱 제거로 방향을 틉니다.</a:t>
+              <a:t>어드바이저는 ch31의 V$DB_CACHE_ADVICE와 읽는 방식이 같습니다. 크기를 바꾸면 효과가 얼마나 변하는가의 곡선을 주고, 요령은 기울기가 꺾여 평평해지는 무릎을 찾는 것입니다. 무릎 이전은 확대가 유효하고 이후는 낭비입니다. 우리 실측은 416MB가 이미 무릎을 지난 지점이라 확대 곡선이 처음부터 평평합니다. 이 어드바이저가 이 장에서 특별한 이유는, ORA-04031을 만나 크기를 키우고 싶을 때 확대 곡선이 평평하면 그것이 크기를 키워도 소용없다는 정량적 증거이기 때문입니다. 곡선이 가파르면 확대, 평평하면 파싱 제거로 방향을 틉니다.</a:t>
             </a:r>
           </a:p>
         </p:txBody>
@@ -2006,7 +2006,7 @@
           <a:lstStyle/>
           <a:p>
             <a:r>
-              <a:t>하드 파싱이 왜 비싼지 알면 조치의 근거가 단단해집니다. 하드 파싱은 구문 분석, 의미 분석, 공유 풀에서 동일 커서 탐색, 최적화, 커서 할당의 다섯 단계를 거칩니다. 마지막 할당 단계에서 라이브러리 캐시 뮤텍스와 shared pool 래치를 잡는데, 이 직렬화 장치는 한 번에 한 세션만 통과시킵니다. 여러 세션이 동시에 하드 파싱하면 여기서 줄을 섭니다. 그 줄서기가 8장과 14장에서 본 library cache mutex X, cursor pin S wait on X 대기로 나타납니다. 공유 풀 문제는 낮은 히트율, 높은 하드 파싱 비율, 뮤텍스·래치 경합의 세 얼굴로 드러나며, 셋이 같은 방향이면 진단은 확정입니다.</a:t>
+              <a:t>하드 파싱이 왜 비싼지 알면 조치의 근거가 단단해집니다. 하드 파싱은 구문 분석, 의미 분석, 공유 풀에서 동일 커서 탐색, 최적화, 커서 할당의 다섯 단계를 거칩니다. 마지막 할당 단계에서 라이브러리 캐시 뮤텍스와 shared pool 래치를 잡는데, 이 직렬화 장치는 한 번에 한 세션만 통과시킵니다. 여러 세션이 동시에 하드 파싱하면 여기서 줄을 섭니다. 그 줄서기가 ch22과 ch27에서 본 library cache mutex X, cursor pin S wait on X 대기로 나타납니다. 공유 풀 문제는 낮은 히트율, 높은 하드 파싱 비율, 뮤텍스·래치 경합의 세 얼굴로 드러나며, 셋이 같은 방향이면 진단은 확정입니다.</a:t>
             </a:r>
           </a:p>
         </p:txBody>
@@ -5291,7 +5291,7 @@
                 </a:solidFill>
                 <a:latin typeface="맑은 고딕"/>
               </a:rPr>
-              <a:t>제18장</a:t>
+              <a:t>제ch32</a:t>
             </a:r>
           </a:p>
         </p:txBody>
@@ -7311,7 +7311,7 @@
                 </a:solidFill>
                 <a:latin typeface="맑은 고딕"/>
               </a:rPr>
-              <a:t>•  2장 바인드 변수를 '공유 풀 점유' 관점에서 다시 봄</a:t>
+              <a:t>•  ch16 바인드 변수를 '공유 풀 점유' 관점에서 다시 봄</a:t>
             </a:r>
           </a:p>
         </p:txBody>
@@ -8913,7 +8913,7 @@
                 </a:solidFill>
                 <a:latin typeface="맑은 고딕"/>
               </a:rPr>
-              <a:t>•  무릎 이전=확대 유효, 무릎 이후=낭비 (17장 V$DB_CACHE_ADVICE와 동일)</a:t>
+              <a:t>•  무릎 이전=확대 유효, 무릎 이후=낭비 (ch31 V$DB_CACHE_ADVICE와 동일)</a:t>
             </a:r>
           </a:p>
           <a:p>
@@ -11773,7 +11773,7 @@
                 </a:solidFill>
                 <a:latin typeface="맑은 고딕"/>
               </a:rPr>
-              <a:t>•  대안: V$ 뷰를 두 시점에 조회해 델타 계산(13·14장 경로)</a:t>
+              <a:t>•  대안: V$ 뷰를 두 시점에 조회해 델타 계산(ch26·ch27 경로)</a:t>
             </a:r>
           </a:p>
         </p:txBody>
@@ -12620,7 +12620,7 @@
                 </a:solidFill>
                 <a:latin typeface="맑은 고딕"/>
               </a:rPr>
-              <a:t>18장의 한 문장</a:t>
+              <a:t>ch32의 한 문장</a:t>
             </a:r>
           </a:p>
         </p:txBody>
@@ -12739,7 +12739,7 @@
                 </a:solidFill>
                 <a:latin typeface="맑은 고딕"/>
               </a:rPr>
-              <a:t>•  16~18장 SGA 3부작의 마지막 · 다음은 19장 결과캐시·PGA</a:t>
+              <a:t>•  ch29~ch32 SGA 3부작의 마지막 · 다음은 ch33 결과캐시·PGA</a:t>
             </a:r>
           </a:p>
         </p:txBody>

--- a/DBTUNING/ch32_SGA튜닝2_공유풀_라지풀/ch32_SGA튜닝_공유풀과라지풀.pptx
+++ b/DBTUNING/ch32_SGA튜닝2_공유풀_라지풀/ch32_SGA튜닝_공유풀과라지풀.pptx
@@ -5291,7 +5291,7 @@
                 </a:solidFill>
                 <a:latin typeface="맑은 고딕"/>
               </a:rPr>
-              <a:t>제ch32</a:t>
+              <a:t>ch32</a:t>
             </a:r>
           </a:p>
         </p:txBody>

--- a/DBTUNING/ch32_SGA튜닝2_공유풀_라지풀/ch32_SGA튜닝_공유풀과라지풀.pptx
+++ b/DBTUNING/ch32_SGA튜닝2_공유풀_라지풀/ch32_SGA튜닝_공유풀과라지풀.pptx
@@ -5874,7 +5874,7 @@
                 </a:solidFill>
                 <a:latin typeface="맑은 고딕"/>
               </a:rPr>
-              <a:t>18.4</a:t>
+              <a:t>32.4</a:t>
             </a:r>
           </a:p>
         </p:txBody>
@@ -6910,7 +6910,7 @@
                 </a:solidFill>
                 <a:latin typeface="맑은 고딕"/>
               </a:rPr>
-              <a:t>18.5</a:t>
+              <a:t>32.5</a:t>
             </a:r>
           </a:p>
         </p:txBody>
@@ -8200,7 +8200,7 @@
                 </a:solidFill>
                 <a:latin typeface="맑은 고딕"/>
               </a:rPr>
-              <a:t>18.6</a:t>
+              <a:t>32.6</a:t>
             </a:r>
           </a:p>
         </p:txBody>
@@ -9042,7 +9042,7 @@
                 </a:solidFill>
                 <a:latin typeface="맑은 고딕"/>
               </a:rPr>
-              <a:t>18.7</a:t>
+              <a:t>32.7</a:t>
             </a:r>
           </a:p>
         </p:txBody>
@@ -9865,7 +9865,7 @@
                 </a:solidFill>
                 <a:latin typeface="맑은 고딕"/>
               </a:rPr>
-              <a:t>18.8</a:t>
+              <a:t>32.8</a:t>
             </a:r>
           </a:p>
         </p:txBody>
@@ -10940,7 +10940,7 @@
                 </a:solidFill>
                 <a:latin typeface="맑은 고딕"/>
               </a:rPr>
-              <a:t>•  18.2  공유 풀은 무엇으로 차 있는가 — V$SGASTAT</a:t>
+              <a:t>•  32.2  공유 풀은 무엇으로 차 있는가 — V$SGASTAT</a:t>
             </a:r>
           </a:p>
           <a:p>
@@ -10956,7 +10956,7 @@
                 </a:solidFill>
                 <a:latin typeface="맑은 고딕"/>
               </a:rPr>
-              <a:t>•  18.3  라이브러리 캐시 판독 — V$LIBRARYCACHE</a:t>
+              <a:t>•  32.3  라이브러리 캐시 판독 — V$LIBRARYCACHE</a:t>
             </a:r>
           </a:p>
           <a:p>
@@ -10972,7 +10972,7 @@
                 </a:solidFill>
                 <a:latin typeface="맑은 고딕"/>
               </a:rPr>
-              <a:t>•  18.4  하드 파싱 — 공유 풀 부족의 진짜 원인</a:t>
+              <a:t>•  32.4  하드 파싱 — 공유 풀 부족의 진짜 원인</a:t>
             </a:r>
           </a:p>
           <a:p>
@@ -10988,7 +10988,7 @@
                 </a:solidFill>
                 <a:latin typeface="맑은 고딕"/>
               </a:rPr>
-              <a:t>•  18.5  커서 공유 — CURSOR_SHARING</a:t>
+              <a:t>•  32.5  커서 공유 — CURSOR_SHARING</a:t>
             </a:r>
           </a:p>
           <a:p>
@@ -11004,7 +11004,7 @@
                 </a:solidFill>
                 <a:latin typeface="맑은 고딕"/>
               </a:rPr>
-              <a:t>•  18.6  공유 풀 어드바이저 — V$SHARED_POOL_ADVICE</a:t>
+              <a:t>•  32.6  공유 풀 어드바이저 — V$SHARED_POOL_ADVICE</a:t>
             </a:r>
           </a:p>
           <a:p>
@@ -11020,7 +11020,7 @@
                 </a:solidFill>
                 <a:latin typeface="맑은 고딕"/>
               </a:rPr>
-              <a:t>•  18.7  ORA-04031 재현과 해소</a:t>
+              <a:t>•  32.7  ORA-04031 재현과 해소</a:t>
             </a:r>
           </a:p>
           <a:p>
@@ -11036,7 +11036,7 @@
                 </a:solidFill>
                 <a:latin typeface="맑은 고딕"/>
               </a:rPr>
-              <a:t>•  18.8  라지 풀 분리 — 공유 풀을 지키는 방벽</a:t>
+              <a:t>•  32.8  라지 풀 분리 — 공유 풀을 지키는 방벽</a:t>
             </a:r>
           </a:p>
           <a:p>
@@ -11052,7 +11052,7 @@
                 </a:solidFill>
                 <a:latin typeface="맑은 고딕"/>
               </a:rPr>
-              <a:t>•  18.9~18.13  체크리스트 · 오판 · 라이선스 · 요약</a:t>
+              <a:t>•  32.9~32.13  체크리스트 · 오판 · 라이선스 · 요약</a:t>
             </a:r>
           </a:p>
         </p:txBody>
@@ -12836,7 +12836,7 @@
                 </a:solidFill>
                 <a:latin typeface="맑은 고딕"/>
               </a:rPr>
-              <a:t>18.2</a:t>
+              <a:t>32.2</a:t>
             </a:r>
           </a:p>
         </p:txBody>
@@ -13697,7 +13697,7 @@
                 </a:solidFill>
                 <a:latin typeface="맑은 고딕"/>
               </a:rPr>
-              <a:t>18.3</a:t>
+              <a:t>32.3</a:t>
             </a:r>
           </a:p>
         </p:txBody>
